--- a/apisiz/raporlar/2026-10-18-rakip-taramasi/sunum/4-erken-uyari.pptx
+++ b/apisiz/raporlar/2026-10-18-rakip-taramasi/sunum/4-erken-uyari.pptx
@@ -3208,7 +3208,7 @@
                   <a:srgbClr val="8A6514"/>
                 </a:solidFill>
               </a:rPr>
-              <a:t>B O L B É</a:t>
+              <a:t>M O T İ F</a:t>
             </a:r>
           </a:p>
         </p:txBody>
@@ -3429,7 +3429,7 @@
                   <a:srgbClr val="5F5C6D"/>
                 </a:solidFill>
               </a:rPr>
-              <a:t>BOLBÉ · 4 · Erken Uyarı Ajanı · Haftalık Rakip Taraması</a:t>
+              <a:t>MOTİF · 4 · Erken Uyarı Ajanı · Haftalık Rakip Taraması</a:t>
             </a:r>
           </a:p>
         </p:txBody>
@@ -3807,7 +3807,7 @@
                   <a:srgbClr val="5F5C6D"/>
                 </a:solidFill>
               </a:rPr>
-              <a:t>BOLBÉ · 4 · Erken Uyarı Ajanı · Haftalık Rakip Taraması</a:t>
+              <a:t>MOTİF · 4 · Erken Uyarı Ajanı · Haftalık Rakip Taraması</a:t>
             </a:r>
           </a:p>
         </p:txBody>
@@ -4086,7 +4086,7 @@
                   <a:srgbClr val="5F5C6D"/>
                 </a:solidFill>
               </a:rPr>
-              <a:t>BOLBÉ · 4 · Erken Uyarı Ajanı · Haftalık Rakip Taraması</a:t>
+              <a:t>MOTİF · 4 · Erken Uyarı Ajanı · Haftalık Rakip Taraması</a:t>
             </a:r>
           </a:p>
         </p:txBody>
@@ -4365,7 +4365,7 @@
                   <a:srgbClr val="5F5C6D"/>
                 </a:solidFill>
               </a:rPr>
-              <a:t>BOLBÉ · 4 · Erken Uyarı Ajanı · Haftalık Rakip Taraması</a:t>
+              <a:t>MOTİF · 4 · Erken Uyarı Ajanı · Haftalık Rakip Taraması</a:t>
             </a:r>
           </a:p>
         </p:txBody>
@@ -4584,7 +4584,7 @@
                   <a:srgbClr val="5F5C6D"/>
                 </a:solidFill>
               </a:rPr>
-              <a:t>BOLBÉ · 4 · Erken Uyarı Ajanı · Haftalık Rakip Taraması</a:t>
+              <a:t>MOTİF · 4 · Erken Uyarı Ajanı · Haftalık Rakip Taraması</a:t>
             </a:r>
           </a:p>
         </p:txBody>
@@ -4997,7 +4997,7 @@
                   <a:srgbClr val="5F5C6D"/>
                 </a:solidFill>
               </a:rPr>
-              <a:t>BOLBÉ · 4 · Erken Uyarı Ajanı · Haftalık Rakip Taraması</a:t>
+              <a:t>MOTİF · 4 · Erken Uyarı Ajanı · Haftalık Rakip Taraması</a:t>
             </a:r>
           </a:p>
         </p:txBody>
